--- a/perception_ppt/perception_output/knowledge/task3_knowledge.pptx
+++ b/perception_ppt/perception_output/knowledge/task3_knowledge.pptx
@@ -9035,7 +9035,7 @@
                 <a:ea typeface="微软雅黑" panose="020B0503020204020204" pitchFamily="34" charset="-122"/>
                 <a:sym typeface="+mn-ea"/>
               </a:rPr>
-              <a:t>一、从提示词到工作流</a:t>
+              <a:t>从提示词到工作流</a:t>
             </a:r>
             <a:endParaRPr lang="zh-CN" altLang="zh-CN" sz="2400" b="1" dirty="0" smtClean="0">
               <a:solidFill>
@@ -13971,7 +13971,7 @@
                 <a:ea typeface="微软雅黑" panose="020B0503020204020204" pitchFamily="34" charset="-122"/>
                 <a:sym typeface="+mn-ea"/>
               </a:rPr>
-              <a:t>一、从提示词到工作流</a:t>
+              <a:t>从提示词到工作流</a:t>
             </a:r>
             <a:endParaRPr lang="zh-CN" altLang="zh-CN" sz="2400" dirty="0" smtClean="0">
               <a:solidFill>
@@ -19763,7 +19763,7 @@
                 <a:ea typeface="微软雅黑" panose="020B0503020204020204" pitchFamily="34" charset="-122"/>
                 <a:sym typeface="+mn-ea"/>
               </a:rPr>
-              <a:t>一、从提示词到工作流</a:t>
+              <a:t>从提示词到工作流</a:t>
             </a:r>
             <a:endParaRPr lang="zh-CN" altLang="zh-CN" sz="2400" dirty="0" smtClean="0">
               <a:solidFill>
@@ -26287,7 +26287,7 @@
                 <a:ea typeface="微软雅黑" panose="020B0503020204020204" pitchFamily="34" charset="-122"/>
                 <a:sym typeface="+mn-ea"/>
               </a:rPr>
-              <a:t>一、从提示词到工作流</a:t>
+              <a:t>从提示词到工作流</a:t>
             </a:r>
             <a:endParaRPr lang="zh-CN" altLang="zh-CN" sz="2400" dirty="0" smtClean="0">
               <a:solidFill>
